--- a/decks/day3/module-8-optional-harnesses.pptx
+++ b/decks/day3/module-8-optional-harnesses.pptx
@@ -2560,7 +2560,7 @@
             <a:avLst/>
           </a:prstGeom>
           <a:solidFill>
-            <a:srgbClr val="CADCFC"/>
+            <a:srgbClr val="F3F4F6"/>
           </a:solidFill>
           <a:ln w="6350">
             <a:solidFill>

--- a/decks/day3/module-8-optional-harnesses.pptx
+++ b/decks/day3/module-8-optional-harnesses.pptx
@@ -4623,8 +4623,8 @@
             <a:tbl>
               <a:tblPr/>
               <a:tblGrid>
-                <a:gridCol w="4206240"/>
-                <a:gridCol w="4206240"/>
+                <a:gridCol w="4447978"/>
+                <a:gridCol w="3964502"/>
               </a:tblGrid>
               <a:tr h="502920">
                 <a:tc>
@@ -8778,9 +8778,9 @@
             <a:tbl>
               <a:tblPr/>
               <a:tblGrid>
-                <a:gridCol w="2804160"/>
-                <a:gridCol w="2804160"/>
-                <a:gridCol w="2804160"/>
+                <a:gridCol w="1352006"/>
+                <a:gridCol w="3680460"/>
+                <a:gridCol w="3380014"/>
               </a:tblGrid>
               <a:tr h="658368">
                 <a:tc>

--- a/decks/day3/module-8-optional-harnesses.pptx
+++ b/decks/day3/module-8-optional-harnesses.pptx
@@ -2904,16 +2904,16 @@
         <p:spPr>
           <a:xfrm>
             <a:off x="512064" y="1197864"/>
-            <a:ext cx="3813048" cy="310896"/>
-          </a:xfrm>
-          <a:prstGeom prst="rect">
-            <a:avLst/>
-          </a:prstGeom>
-          <a:noFill/>
-          <a:ln/>
-        </p:spPr>
-        <p:txBody>
-          <a:bodyPr wrap="square" lIns="0" tIns="0" rIns="0" bIns="0" rtlCol="0" anchor="ctr">
+            <a:ext cx="3813048" cy="311277"/>
+          </a:xfrm>
+          <a:prstGeom prst="rect">
+            <a:avLst/>
+          </a:prstGeom>
+          <a:noFill/>
+          <a:ln/>
+        </p:spPr>
+        <p:txBody>
+          <a:bodyPr wrap="square" lIns="0" tIns="0" rIns="0" bIns="0" rtlCol="0" anchor="t">
             <a:normAutofit/>
           </a:bodyPr>
           <a:lstStyle/>
@@ -2944,8 +2944,8 @@
         </p:nvSpPr>
         <p:spPr>
           <a:xfrm>
-            <a:off x="512064" y="1581912"/>
-            <a:ext cx="3813048" cy="1033272"/>
+            <a:off x="512064" y="1564005"/>
+            <a:ext cx="3813048" cy="1078611"/>
           </a:xfrm>
           <a:prstGeom prst="rect">
             <a:avLst/>
@@ -3013,16 +3013,16 @@
         <p:spPr>
           <a:xfrm>
             <a:off x="4818888" y="1197864"/>
-            <a:ext cx="3813048" cy="310896"/>
-          </a:xfrm>
-          <a:prstGeom prst="rect">
-            <a:avLst/>
-          </a:prstGeom>
-          <a:noFill/>
-          <a:ln/>
-        </p:spPr>
-        <p:txBody>
-          <a:bodyPr wrap="square" lIns="0" tIns="0" rIns="0" bIns="0" rtlCol="0" anchor="ctr">
+            <a:ext cx="3813048" cy="311277"/>
+          </a:xfrm>
+          <a:prstGeom prst="rect">
+            <a:avLst/>
+          </a:prstGeom>
+          <a:noFill/>
+          <a:ln/>
+        </p:spPr>
+        <p:txBody>
+          <a:bodyPr wrap="square" lIns="0" tIns="0" rIns="0" bIns="0" rtlCol="0" anchor="t">
             <a:normAutofit/>
           </a:bodyPr>
           <a:lstStyle/>
@@ -3053,8 +3053,8 @@
         </p:nvSpPr>
         <p:spPr>
           <a:xfrm>
-            <a:off x="4818888" y="1581912"/>
-            <a:ext cx="3813048" cy="1033272"/>
+            <a:off x="4818888" y="1564005"/>
+            <a:ext cx="3813048" cy="1078611"/>
           </a:xfrm>
           <a:prstGeom prst="rect">
             <a:avLst/>
@@ -3122,16 +3122,16 @@
         <p:spPr>
           <a:xfrm>
             <a:off x="512064" y="3054096"/>
-            <a:ext cx="3813048" cy="310896"/>
-          </a:xfrm>
-          <a:prstGeom prst="rect">
-            <a:avLst/>
-          </a:prstGeom>
-          <a:noFill/>
-          <a:ln/>
-        </p:spPr>
-        <p:txBody>
-          <a:bodyPr wrap="square" lIns="0" tIns="0" rIns="0" bIns="0" rtlCol="0" anchor="ctr">
+            <a:ext cx="3813048" cy="311277"/>
+          </a:xfrm>
+          <a:prstGeom prst="rect">
+            <a:avLst/>
+          </a:prstGeom>
+          <a:noFill/>
+          <a:ln/>
+        </p:spPr>
+        <p:txBody>
+          <a:bodyPr wrap="square" lIns="0" tIns="0" rIns="0" bIns="0" rtlCol="0" anchor="t">
             <a:normAutofit/>
           </a:bodyPr>
           <a:lstStyle/>
@@ -3162,8 +3162,8 @@
         </p:nvSpPr>
         <p:spPr>
           <a:xfrm>
-            <a:off x="512064" y="3438144"/>
-            <a:ext cx="3813048" cy="1033272"/>
+            <a:off x="512064" y="3420237"/>
+            <a:ext cx="3813048" cy="1078611"/>
           </a:xfrm>
           <a:prstGeom prst="rect">
             <a:avLst/>
@@ -3231,16 +3231,16 @@
         <p:spPr>
           <a:xfrm>
             <a:off x="4818888" y="3054096"/>
-            <a:ext cx="3813048" cy="310896"/>
-          </a:xfrm>
-          <a:prstGeom prst="rect">
-            <a:avLst/>
-          </a:prstGeom>
-          <a:noFill/>
-          <a:ln/>
-        </p:spPr>
-        <p:txBody>
-          <a:bodyPr wrap="square" lIns="0" tIns="0" rIns="0" bIns="0" rtlCol="0" anchor="ctr">
+            <a:ext cx="3813048" cy="311277"/>
+          </a:xfrm>
+          <a:prstGeom prst="rect">
+            <a:avLst/>
+          </a:prstGeom>
+          <a:noFill/>
+          <a:ln/>
+        </p:spPr>
+        <p:txBody>
+          <a:bodyPr wrap="square" lIns="0" tIns="0" rIns="0" bIns="0" rtlCol="0" anchor="t">
             <a:normAutofit/>
           </a:bodyPr>
           <a:lstStyle/>
@@ -3271,8 +3271,8 @@
         </p:nvSpPr>
         <p:spPr>
           <a:xfrm>
-            <a:off x="4818888" y="3438144"/>
-            <a:ext cx="3813048" cy="1033272"/>
+            <a:off x="4818888" y="3420237"/>
+            <a:ext cx="3813048" cy="1078611"/>
           </a:xfrm>
           <a:prstGeom prst="rect">
             <a:avLst/>
@@ -3597,16 +3597,16 @@
         <p:spPr>
           <a:xfrm>
             <a:off x="896112" y="1335024"/>
-            <a:ext cx="1975104" cy="310896"/>
-          </a:xfrm>
-          <a:prstGeom prst="rect">
-            <a:avLst/>
-          </a:prstGeom>
-          <a:noFill/>
-          <a:ln/>
-        </p:spPr>
-        <p:txBody>
-          <a:bodyPr wrap="square" lIns="0" tIns="0" rIns="0" bIns="0" rtlCol="0" anchor="ctr">
+            <a:ext cx="1975104" cy="311277"/>
+          </a:xfrm>
+          <a:prstGeom prst="rect">
+            <a:avLst/>
+          </a:prstGeom>
+          <a:noFill/>
+          <a:ln/>
+        </p:spPr>
+        <p:txBody>
+          <a:bodyPr wrap="square" lIns="0" tIns="0" rIns="0" bIns="0" rtlCol="0" anchor="t">
             <a:normAutofit/>
           </a:bodyPr>
           <a:lstStyle/>
@@ -3637,8 +3637,8 @@
         </p:nvSpPr>
         <p:spPr>
           <a:xfrm>
-            <a:off x="512064" y="1719072"/>
-            <a:ext cx="2340864" cy="950976"/>
+            <a:off x="512064" y="1701165"/>
+            <a:ext cx="2340864" cy="996315"/>
           </a:xfrm>
           <a:prstGeom prst="rect">
             <a:avLst/>
@@ -3785,16 +3785,16 @@
         <p:spPr>
           <a:xfrm>
             <a:off x="3785616" y="1335024"/>
-            <a:ext cx="1975104" cy="310896"/>
-          </a:xfrm>
-          <a:prstGeom prst="rect">
-            <a:avLst/>
-          </a:prstGeom>
-          <a:noFill/>
-          <a:ln/>
-        </p:spPr>
-        <p:txBody>
-          <a:bodyPr wrap="square" lIns="0" tIns="0" rIns="0" bIns="0" rtlCol="0" anchor="ctr">
+            <a:ext cx="1975104" cy="311277"/>
+          </a:xfrm>
+          <a:prstGeom prst="rect">
+            <a:avLst/>
+          </a:prstGeom>
+          <a:noFill/>
+          <a:ln/>
+        </p:spPr>
+        <p:txBody>
+          <a:bodyPr wrap="square" lIns="0" tIns="0" rIns="0" bIns="0" rtlCol="0" anchor="t">
             <a:normAutofit/>
           </a:bodyPr>
           <a:lstStyle/>
@@ -3825,8 +3825,8 @@
         </p:nvSpPr>
         <p:spPr>
           <a:xfrm>
-            <a:off x="3401568" y="1719072"/>
-            <a:ext cx="2340864" cy="950976"/>
+            <a:off x="3401568" y="1701165"/>
+            <a:ext cx="2340864" cy="996315"/>
           </a:xfrm>
           <a:prstGeom prst="rect">
             <a:avLst/>
@@ -3973,16 +3973,16 @@
         <p:spPr>
           <a:xfrm>
             <a:off x="6675120" y="1335024"/>
-            <a:ext cx="1975104" cy="310896"/>
-          </a:xfrm>
-          <a:prstGeom prst="rect">
-            <a:avLst/>
-          </a:prstGeom>
-          <a:noFill/>
-          <a:ln/>
-        </p:spPr>
-        <p:txBody>
-          <a:bodyPr wrap="square" lIns="0" tIns="0" rIns="0" bIns="0" rtlCol="0" anchor="ctr">
+            <a:ext cx="1975104" cy="311277"/>
+          </a:xfrm>
+          <a:prstGeom prst="rect">
+            <a:avLst/>
+          </a:prstGeom>
+          <a:noFill/>
+          <a:ln/>
+        </p:spPr>
+        <p:txBody>
+          <a:bodyPr wrap="square" lIns="0" tIns="0" rIns="0" bIns="0" rtlCol="0" anchor="t">
             <a:normAutofit/>
           </a:bodyPr>
           <a:lstStyle/>
@@ -4013,8 +4013,8 @@
         </p:nvSpPr>
         <p:spPr>
           <a:xfrm>
-            <a:off x="6291072" y="1719072"/>
-            <a:ext cx="2340864" cy="950976"/>
+            <a:off x="6291072" y="1701165"/>
+            <a:ext cx="2340864" cy="996315"/>
           </a:xfrm>
           <a:prstGeom prst="rect">
             <a:avLst/>
@@ -4141,16 +4141,16 @@
         <p:spPr>
           <a:xfrm>
             <a:off x="896112" y="3163824"/>
-            <a:ext cx="1975104" cy="310896"/>
-          </a:xfrm>
-          <a:prstGeom prst="rect">
-            <a:avLst/>
-          </a:prstGeom>
-          <a:noFill/>
-          <a:ln/>
-        </p:spPr>
-        <p:txBody>
-          <a:bodyPr wrap="square" lIns="0" tIns="0" rIns="0" bIns="0" rtlCol="0" anchor="ctr">
+            <a:ext cx="1975104" cy="311277"/>
+          </a:xfrm>
+          <a:prstGeom prst="rect">
+            <a:avLst/>
+          </a:prstGeom>
+          <a:noFill/>
+          <a:ln/>
+        </p:spPr>
+        <p:txBody>
+          <a:bodyPr wrap="square" lIns="0" tIns="0" rIns="0" bIns="0" rtlCol="0" anchor="t">
             <a:normAutofit/>
           </a:bodyPr>
           <a:lstStyle/>
@@ -4181,8 +4181,8 @@
         </p:nvSpPr>
         <p:spPr>
           <a:xfrm>
-            <a:off x="512064" y="3547872"/>
-            <a:ext cx="2340864" cy="950976"/>
+            <a:off x="512064" y="3529965"/>
+            <a:ext cx="2340864" cy="996315"/>
           </a:xfrm>
           <a:prstGeom prst="rect">
             <a:avLst/>
@@ -4329,16 +4329,16 @@
         <p:spPr>
           <a:xfrm>
             <a:off x="3785616" y="3163824"/>
-            <a:ext cx="1975104" cy="310896"/>
-          </a:xfrm>
-          <a:prstGeom prst="rect">
-            <a:avLst/>
-          </a:prstGeom>
-          <a:noFill/>
-          <a:ln/>
-        </p:spPr>
-        <p:txBody>
-          <a:bodyPr wrap="square" lIns="0" tIns="0" rIns="0" bIns="0" rtlCol="0" anchor="ctr">
+            <a:ext cx="1975104" cy="311277"/>
+          </a:xfrm>
+          <a:prstGeom prst="rect">
+            <a:avLst/>
+          </a:prstGeom>
+          <a:noFill/>
+          <a:ln/>
+        </p:spPr>
+        <p:txBody>
+          <a:bodyPr wrap="square" lIns="0" tIns="0" rIns="0" bIns="0" rtlCol="0" anchor="t">
             <a:normAutofit/>
           </a:bodyPr>
           <a:lstStyle/>
@@ -4369,8 +4369,8 @@
         </p:nvSpPr>
         <p:spPr>
           <a:xfrm>
-            <a:off x="3401568" y="3547872"/>
-            <a:ext cx="2340864" cy="950976"/>
+            <a:off x="3401568" y="3529965"/>
+            <a:ext cx="2340864" cy="996315"/>
           </a:xfrm>
           <a:prstGeom prst="rect">
             <a:avLst/>
@@ -6316,16 +6316,16 @@
         <p:spPr>
           <a:xfrm>
             <a:off x="512064" y="1197864"/>
-            <a:ext cx="2377440" cy="310896"/>
-          </a:xfrm>
-          <a:prstGeom prst="rect">
-            <a:avLst/>
-          </a:prstGeom>
-          <a:noFill/>
-          <a:ln/>
-        </p:spPr>
-        <p:txBody>
-          <a:bodyPr wrap="square" lIns="0" tIns="0" rIns="0" bIns="0" rtlCol="0" anchor="ctr">
+            <a:ext cx="2377440" cy="549402"/>
+          </a:xfrm>
+          <a:prstGeom prst="rect">
+            <a:avLst/>
+          </a:prstGeom>
+          <a:noFill/>
+          <a:ln/>
+        </p:spPr>
+        <p:txBody>
+          <a:bodyPr wrap="square" lIns="0" tIns="0" rIns="0" bIns="0" rtlCol="0" anchor="t">
             <a:normAutofit/>
           </a:bodyPr>
           <a:lstStyle/>
@@ -6356,8 +6356,8 @@
         </p:nvSpPr>
         <p:spPr>
           <a:xfrm>
-            <a:off x="512064" y="1581912"/>
-            <a:ext cx="2377440" cy="1033272"/>
+            <a:off x="512064" y="1802130"/>
+            <a:ext cx="2377440" cy="840486"/>
           </a:xfrm>
           <a:prstGeom prst="rect">
             <a:avLst/>
@@ -6425,16 +6425,16 @@
         <p:spPr>
           <a:xfrm>
             <a:off x="3383280" y="1197864"/>
-            <a:ext cx="2377440" cy="310896"/>
-          </a:xfrm>
-          <a:prstGeom prst="rect">
-            <a:avLst/>
-          </a:prstGeom>
-          <a:noFill/>
-          <a:ln/>
-        </p:spPr>
-        <p:txBody>
-          <a:bodyPr wrap="square" lIns="0" tIns="0" rIns="0" bIns="0" rtlCol="0" anchor="ctr">
+            <a:ext cx="2377440" cy="311277"/>
+          </a:xfrm>
+          <a:prstGeom prst="rect">
+            <a:avLst/>
+          </a:prstGeom>
+          <a:noFill/>
+          <a:ln/>
+        </p:spPr>
+        <p:txBody>
+          <a:bodyPr wrap="square" lIns="0" tIns="0" rIns="0" bIns="0" rtlCol="0" anchor="t">
             <a:normAutofit/>
           </a:bodyPr>
           <a:lstStyle/>
@@ -6465,8 +6465,8 @@
         </p:nvSpPr>
         <p:spPr>
           <a:xfrm>
-            <a:off x="3383280" y="1581912"/>
-            <a:ext cx="2377440" cy="1033272"/>
+            <a:off x="3383280" y="1564005"/>
+            <a:ext cx="2377440" cy="1078611"/>
           </a:xfrm>
           <a:prstGeom prst="rect">
             <a:avLst/>
@@ -6534,16 +6534,16 @@
         <p:spPr>
           <a:xfrm>
             <a:off x="6254496" y="1197864"/>
-            <a:ext cx="2377440" cy="310896"/>
-          </a:xfrm>
-          <a:prstGeom prst="rect">
-            <a:avLst/>
-          </a:prstGeom>
-          <a:noFill/>
-          <a:ln/>
-        </p:spPr>
-        <p:txBody>
-          <a:bodyPr wrap="square" lIns="0" tIns="0" rIns="0" bIns="0" rtlCol="0" anchor="ctr">
+            <a:ext cx="2377440" cy="311277"/>
+          </a:xfrm>
+          <a:prstGeom prst="rect">
+            <a:avLst/>
+          </a:prstGeom>
+          <a:noFill/>
+          <a:ln/>
+        </p:spPr>
+        <p:txBody>
+          <a:bodyPr wrap="square" lIns="0" tIns="0" rIns="0" bIns="0" rtlCol="0" anchor="t">
             <a:normAutofit/>
           </a:bodyPr>
           <a:lstStyle/>
@@ -6574,8 +6574,8 @@
         </p:nvSpPr>
         <p:spPr>
           <a:xfrm>
-            <a:off x="6254496" y="1581912"/>
-            <a:ext cx="2377440" cy="1033272"/>
+            <a:off x="6254496" y="1564005"/>
+            <a:ext cx="2377440" cy="1078611"/>
           </a:xfrm>
           <a:prstGeom prst="rect">
             <a:avLst/>
@@ -6643,16 +6643,16 @@
         <p:spPr>
           <a:xfrm>
             <a:off x="512064" y="3054096"/>
-            <a:ext cx="2377440" cy="310896"/>
-          </a:xfrm>
-          <a:prstGeom prst="rect">
-            <a:avLst/>
-          </a:prstGeom>
-          <a:noFill/>
-          <a:ln/>
-        </p:spPr>
-        <p:txBody>
-          <a:bodyPr wrap="square" lIns="0" tIns="0" rIns="0" bIns="0" rtlCol="0" anchor="ctr">
+            <a:ext cx="2377440" cy="311277"/>
+          </a:xfrm>
+          <a:prstGeom prst="rect">
+            <a:avLst/>
+          </a:prstGeom>
+          <a:noFill/>
+          <a:ln/>
+        </p:spPr>
+        <p:txBody>
+          <a:bodyPr wrap="square" lIns="0" tIns="0" rIns="0" bIns="0" rtlCol="0" anchor="t">
             <a:normAutofit/>
           </a:bodyPr>
           <a:lstStyle/>
@@ -6683,8 +6683,8 @@
         </p:nvSpPr>
         <p:spPr>
           <a:xfrm>
-            <a:off x="512064" y="3438144"/>
-            <a:ext cx="2377440" cy="1033272"/>
+            <a:off x="512064" y="3420237"/>
+            <a:ext cx="2377440" cy="1078611"/>
           </a:xfrm>
           <a:prstGeom prst="rect">
             <a:avLst/>
@@ -6752,16 +6752,16 @@
         <p:spPr>
           <a:xfrm>
             <a:off x="3383280" y="3054096"/>
-            <a:ext cx="2377440" cy="310896"/>
-          </a:xfrm>
-          <a:prstGeom prst="rect">
-            <a:avLst/>
-          </a:prstGeom>
-          <a:noFill/>
-          <a:ln/>
-        </p:spPr>
-        <p:txBody>
-          <a:bodyPr wrap="square" lIns="0" tIns="0" rIns="0" bIns="0" rtlCol="0" anchor="ctr">
+            <a:ext cx="2377440" cy="311277"/>
+          </a:xfrm>
+          <a:prstGeom prst="rect">
+            <a:avLst/>
+          </a:prstGeom>
+          <a:noFill/>
+          <a:ln/>
+        </p:spPr>
+        <p:txBody>
+          <a:bodyPr wrap="square" lIns="0" tIns="0" rIns="0" bIns="0" rtlCol="0" anchor="t">
             <a:normAutofit/>
           </a:bodyPr>
           <a:lstStyle/>
@@ -6792,8 +6792,8 @@
         </p:nvSpPr>
         <p:spPr>
           <a:xfrm>
-            <a:off x="3383280" y="3438144"/>
-            <a:ext cx="2377440" cy="1033272"/>
+            <a:off x="3383280" y="3420237"/>
+            <a:ext cx="2377440" cy="1078611"/>
           </a:xfrm>
           <a:prstGeom prst="rect">
             <a:avLst/>
@@ -7118,16 +7118,16 @@
         <p:spPr>
           <a:xfrm>
             <a:off x="896112" y="1335024"/>
-            <a:ext cx="1975104" cy="310896"/>
-          </a:xfrm>
-          <a:prstGeom prst="rect">
-            <a:avLst/>
-          </a:prstGeom>
-          <a:noFill/>
-          <a:ln/>
-        </p:spPr>
-        <p:txBody>
-          <a:bodyPr wrap="square" lIns="0" tIns="0" rIns="0" bIns="0" rtlCol="0" anchor="ctr">
+            <a:ext cx="1975104" cy="311277"/>
+          </a:xfrm>
+          <a:prstGeom prst="rect">
+            <a:avLst/>
+          </a:prstGeom>
+          <a:noFill/>
+          <a:ln/>
+        </p:spPr>
+        <p:txBody>
+          <a:bodyPr wrap="square" lIns="0" tIns="0" rIns="0" bIns="0" rtlCol="0" anchor="t">
             <a:normAutofit/>
           </a:bodyPr>
           <a:lstStyle/>
@@ -7158,8 +7158,8 @@
         </p:nvSpPr>
         <p:spPr>
           <a:xfrm>
-            <a:off x="512064" y="1719072"/>
-            <a:ext cx="2340864" cy="950976"/>
+            <a:off x="512064" y="1701165"/>
+            <a:ext cx="2340864" cy="996315"/>
           </a:xfrm>
           <a:prstGeom prst="rect">
             <a:avLst/>
@@ -7306,16 +7306,16 @@
         <p:spPr>
           <a:xfrm>
             <a:off x="3785616" y="1335024"/>
-            <a:ext cx="1975104" cy="310896"/>
-          </a:xfrm>
-          <a:prstGeom prst="rect">
-            <a:avLst/>
-          </a:prstGeom>
-          <a:noFill/>
-          <a:ln/>
-        </p:spPr>
-        <p:txBody>
-          <a:bodyPr wrap="square" lIns="0" tIns="0" rIns="0" bIns="0" rtlCol="0" anchor="ctr">
+            <a:ext cx="1975104" cy="311277"/>
+          </a:xfrm>
+          <a:prstGeom prst="rect">
+            <a:avLst/>
+          </a:prstGeom>
+          <a:noFill/>
+          <a:ln/>
+        </p:spPr>
+        <p:txBody>
+          <a:bodyPr wrap="square" lIns="0" tIns="0" rIns="0" bIns="0" rtlCol="0" anchor="t">
             <a:normAutofit/>
           </a:bodyPr>
           <a:lstStyle/>
@@ -7346,8 +7346,8 @@
         </p:nvSpPr>
         <p:spPr>
           <a:xfrm>
-            <a:off x="3401568" y="1719072"/>
-            <a:ext cx="2340864" cy="950976"/>
+            <a:off x="3401568" y="1701165"/>
+            <a:ext cx="2340864" cy="996315"/>
           </a:xfrm>
           <a:prstGeom prst="rect">
             <a:avLst/>
@@ -7494,16 +7494,16 @@
         <p:spPr>
           <a:xfrm>
             <a:off x="6675120" y="1335024"/>
-            <a:ext cx="1975104" cy="310896"/>
-          </a:xfrm>
-          <a:prstGeom prst="rect">
-            <a:avLst/>
-          </a:prstGeom>
-          <a:noFill/>
-          <a:ln/>
-        </p:spPr>
-        <p:txBody>
-          <a:bodyPr wrap="square" lIns="0" tIns="0" rIns="0" bIns="0" rtlCol="0" anchor="ctr">
+            <a:ext cx="1975104" cy="311277"/>
+          </a:xfrm>
+          <a:prstGeom prst="rect">
+            <a:avLst/>
+          </a:prstGeom>
+          <a:noFill/>
+          <a:ln/>
+        </p:spPr>
+        <p:txBody>
+          <a:bodyPr wrap="square" lIns="0" tIns="0" rIns="0" bIns="0" rtlCol="0" anchor="t">
             <a:normAutofit/>
           </a:bodyPr>
           <a:lstStyle/>
@@ -7534,8 +7534,8 @@
         </p:nvSpPr>
         <p:spPr>
           <a:xfrm>
-            <a:off x="6291072" y="1719072"/>
-            <a:ext cx="2340864" cy="950976"/>
+            <a:off x="6291072" y="1701165"/>
+            <a:ext cx="2340864" cy="996315"/>
           </a:xfrm>
           <a:prstGeom prst="rect">
             <a:avLst/>
@@ -7662,16 +7662,16 @@
         <p:spPr>
           <a:xfrm>
             <a:off x="896112" y="3163824"/>
-            <a:ext cx="1975104" cy="310896"/>
-          </a:xfrm>
-          <a:prstGeom prst="rect">
-            <a:avLst/>
-          </a:prstGeom>
-          <a:noFill/>
-          <a:ln/>
-        </p:spPr>
-        <p:txBody>
-          <a:bodyPr wrap="square" lIns="0" tIns="0" rIns="0" bIns="0" rtlCol="0" anchor="ctr">
+            <a:ext cx="1975104" cy="311277"/>
+          </a:xfrm>
+          <a:prstGeom prst="rect">
+            <a:avLst/>
+          </a:prstGeom>
+          <a:noFill/>
+          <a:ln/>
+        </p:spPr>
+        <p:txBody>
+          <a:bodyPr wrap="square" lIns="0" tIns="0" rIns="0" bIns="0" rtlCol="0" anchor="t">
             <a:normAutofit/>
           </a:bodyPr>
           <a:lstStyle/>
@@ -7702,8 +7702,8 @@
         </p:nvSpPr>
         <p:spPr>
           <a:xfrm>
-            <a:off x="512064" y="3547872"/>
-            <a:ext cx="2340864" cy="950976"/>
+            <a:off x="512064" y="3529965"/>
+            <a:ext cx="2340864" cy="996315"/>
           </a:xfrm>
           <a:prstGeom prst="rect">
             <a:avLst/>
@@ -7850,16 +7850,16 @@
         <p:spPr>
           <a:xfrm>
             <a:off x="3785616" y="3163824"/>
-            <a:ext cx="1975104" cy="310896"/>
-          </a:xfrm>
-          <a:prstGeom prst="rect">
-            <a:avLst/>
-          </a:prstGeom>
-          <a:noFill/>
-          <a:ln/>
-        </p:spPr>
-        <p:txBody>
-          <a:bodyPr wrap="square" lIns="0" tIns="0" rIns="0" bIns="0" rtlCol="0" anchor="ctr">
+            <a:ext cx="1975104" cy="311277"/>
+          </a:xfrm>
+          <a:prstGeom prst="rect">
+            <a:avLst/>
+          </a:prstGeom>
+          <a:noFill/>
+          <a:ln/>
+        </p:spPr>
+        <p:txBody>
+          <a:bodyPr wrap="square" lIns="0" tIns="0" rIns="0" bIns="0" rtlCol="0" anchor="t">
             <a:normAutofit/>
           </a:bodyPr>
           <a:lstStyle/>
@@ -7890,8 +7890,8 @@
         </p:nvSpPr>
         <p:spPr>
           <a:xfrm>
-            <a:off x="3401568" y="3547872"/>
-            <a:ext cx="2340864" cy="950976"/>
+            <a:off x="3401568" y="3529965"/>
+            <a:ext cx="2340864" cy="996315"/>
           </a:xfrm>
           <a:prstGeom prst="rect">
             <a:avLst/>
@@ -8157,16 +8157,16 @@
         <p:spPr>
           <a:xfrm>
             <a:off x="512064" y="1197864"/>
-            <a:ext cx="3813048" cy="310896"/>
-          </a:xfrm>
-          <a:prstGeom prst="rect">
-            <a:avLst/>
-          </a:prstGeom>
-          <a:noFill/>
-          <a:ln/>
-        </p:spPr>
-        <p:txBody>
-          <a:bodyPr wrap="square" lIns="0" tIns="0" rIns="0" bIns="0" rtlCol="0" anchor="ctr">
+            <a:ext cx="3813048" cy="311277"/>
+          </a:xfrm>
+          <a:prstGeom prst="rect">
+            <a:avLst/>
+          </a:prstGeom>
+          <a:noFill/>
+          <a:ln/>
+        </p:spPr>
+        <p:txBody>
+          <a:bodyPr wrap="square" lIns="0" tIns="0" rIns="0" bIns="0" rtlCol="0" anchor="t">
             <a:normAutofit/>
           </a:bodyPr>
           <a:lstStyle/>
@@ -8197,8 +8197,8 @@
         </p:nvSpPr>
         <p:spPr>
           <a:xfrm>
-            <a:off x="512064" y="1581912"/>
-            <a:ext cx="3813048" cy="1033272"/>
+            <a:off x="512064" y="1564005"/>
+            <a:ext cx="3813048" cy="1078611"/>
           </a:xfrm>
           <a:prstGeom prst="rect">
             <a:avLst/>
@@ -8266,16 +8266,16 @@
         <p:spPr>
           <a:xfrm>
             <a:off x="4818888" y="1197864"/>
-            <a:ext cx="3813048" cy="310896"/>
-          </a:xfrm>
-          <a:prstGeom prst="rect">
-            <a:avLst/>
-          </a:prstGeom>
-          <a:noFill/>
-          <a:ln/>
-        </p:spPr>
-        <p:txBody>
-          <a:bodyPr wrap="square" lIns="0" tIns="0" rIns="0" bIns="0" rtlCol="0" anchor="ctr">
+            <a:ext cx="3813048" cy="311277"/>
+          </a:xfrm>
+          <a:prstGeom prst="rect">
+            <a:avLst/>
+          </a:prstGeom>
+          <a:noFill/>
+          <a:ln/>
+        </p:spPr>
+        <p:txBody>
+          <a:bodyPr wrap="square" lIns="0" tIns="0" rIns="0" bIns="0" rtlCol="0" anchor="t">
             <a:normAutofit/>
           </a:bodyPr>
           <a:lstStyle/>
@@ -8306,8 +8306,8 @@
         </p:nvSpPr>
         <p:spPr>
           <a:xfrm>
-            <a:off x="4818888" y="1581912"/>
-            <a:ext cx="3813048" cy="1033272"/>
+            <a:off x="4818888" y="1564005"/>
+            <a:ext cx="3813048" cy="1078611"/>
           </a:xfrm>
           <a:prstGeom prst="rect">
             <a:avLst/>
@@ -8375,16 +8375,16 @@
         <p:spPr>
           <a:xfrm>
             <a:off x="512064" y="3054096"/>
-            <a:ext cx="3813048" cy="310896"/>
-          </a:xfrm>
-          <a:prstGeom prst="rect">
-            <a:avLst/>
-          </a:prstGeom>
-          <a:noFill/>
-          <a:ln/>
-        </p:spPr>
-        <p:txBody>
-          <a:bodyPr wrap="square" lIns="0" tIns="0" rIns="0" bIns="0" rtlCol="0" anchor="ctr">
+            <a:ext cx="3813048" cy="311277"/>
+          </a:xfrm>
+          <a:prstGeom prst="rect">
+            <a:avLst/>
+          </a:prstGeom>
+          <a:noFill/>
+          <a:ln/>
+        </p:spPr>
+        <p:txBody>
+          <a:bodyPr wrap="square" lIns="0" tIns="0" rIns="0" bIns="0" rtlCol="0" anchor="t">
             <a:normAutofit/>
           </a:bodyPr>
           <a:lstStyle/>
@@ -8415,8 +8415,8 @@
         </p:nvSpPr>
         <p:spPr>
           <a:xfrm>
-            <a:off x="512064" y="3438144"/>
-            <a:ext cx="3813048" cy="1033272"/>
+            <a:off x="512064" y="3420237"/>
+            <a:ext cx="3813048" cy="1078611"/>
           </a:xfrm>
           <a:prstGeom prst="rect">
             <a:avLst/>
@@ -8484,16 +8484,16 @@
         <p:spPr>
           <a:xfrm>
             <a:off x="4818888" y="3054096"/>
-            <a:ext cx="3813048" cy="310896"/>
-          </a:xfrm>
-          <a:prstGeom prst="rect">
-            <a:avLst/>
-          </a:prstGeom>
-          <a:noFill/>
-          <a:ln/>
-        </p:spPr>
-        <p:txBody>
-          <a:bodyPr wrap="square" lIns="0" tIns="0" rIns="0" bIns="0" rtlCol="0" anchor="ctr">
+            <a:ext cx="3813048" cy="311277"/>
+          </a:xfrm>
+          <a:prstGeom prst="rect">
+            <a:avLst/>
+          </a:prstGeom>
+          <a:noFill/>
+          <a:ln/>
+        </p:spPr>
+        <p:txBody>
+          <a:bodyPr wrap="square" lIns="0" tIns="0" rIns="0" bIns="0" rtlCol="0" anchor="t">
             <a:normAutofit/>
           </a:bodyPr>
           <a:lstStyle/>
@@ -8524,8 +8524,8 @@
         </p:nvSpPr>
         <p:spPr>
           <a:xfrm>
-            <a:off x="4818888" y="3438144"/>
-            <a:ext cx="3813048" cy="1033272"/>
+            <a:off x="4818888" y="3420237"/>
+            <a:ext cx="3813048" cy="1078611"/>
           </a:xfrm>
           <a:prstGeom prst="rect">
             <a:avLst/>
